--- a/Hazir Pitch Deck.pptx
+++ b/Hazir Pitch Deck.pptx
@@ -3570,7 +3570,7 @@
                 <a:ea typeface="Calibri" pitchFamily="34" charset="-122"/>
                 <a:cs typeface="Calibri" pitchFamily="34" charset="-120"/>
               </a:rPr>
-              <a:t>Week 1 of the prototype phase</a:t>
+              <a:t>Built and submitted</a:t>
             </a:r>
             <a:endParaRPr lang="en-US" sz="1500" dirty="0"/>
           </a:p>
@@ -3612,7 +3612,7 @@
                 <a:ea typeface="Calibri" pitchFamily="34" charset="-122"/>
                 <a:cs typeface="Calibri" pitchFamily="34" charset="-120"/>
               </a:rPr>
-              <a:t>Zone fences, induction consent and the live muster count on Nokia simulator numbers.</a:t>
+              <a:t>Zone fences, induction consent, the muster count, ticket checks, the heat rule and the rescue lane.</a:t>
             </a:r>
             <a:endParaRPr lang="en-US" sz="1300" dirty="0"/>
           </a:p>
@@ -3715,7 +3715,7 @@
                 <a:ea typeface="Calibri" pitchFamily="34" charset="-122"/>
                 <a:cs typeface="Calibri" pitchFamily="34" charset="-120"/>
               </a:rPr>
-              <a:t>Week 2</a:t>
+              <a:t>Next, with an operator key</a:t>
             </a:r>
             <a:endParaRPr lang="en-US" sz="1500" dirty="0"/>
           </a:p>
@@ -3757,7 +3757,7 @@
                 <a:ea typeface="Calibri" pitchFamily="34" charset="-122"/>
                 <a:cs typeface="Calibri" pitchFamily="34" charset="-120"/>
               </a:rPr>
-              <a:t>Ticket checks per zone, the heat rule, the silent line search list and the reserved lane for the team.</a:t>
+              <a:t>The same agent against live Nokia Network as Code, replacing simulator answers one API at a time.</a:t>
             </a:r>
             <a:endParaRPr lang="en-US" sz="1300" dirty="0"/>
           </a:p>
@@ -7502,7 +7502,7 @@
                 <a:ea typeface="Calibri" pitchFamily="34" charset="-122"/>
                 <a:cs typeface="Calibri" pitchFamily="34" charset="-120"/>
               </a:rPr>
-              <a:t>Geofencing</a:t>
+              <a:t>Number Verification</a:t>
             </a:r>
             <a:endParaRPr lang="en-US" sz="1450" dirty="0"/>
           </a:p>
@@ -7544,7 +7544,7 @@
                 <a:ea typeface="Calibri" pitchFamily="34" charset="-122"/>
                 <a:cs typeface="Calibri" pitchFamily="34" charset="-120"/>
               </a:rPr>
-              <a:t>One subscription per line and work zone, created at induction.</a:t>
+              <a:t>Confirms the company line is the one in the worker's hand.</a:t>
             </a:r>
             <a:endParaRPr lang="en-US" sz="1250" dirty="0"/>
           </a:p>
@@ -7635,7 +7635,7 @@
                 <a:ea typeface="Calibri" pitchFamily="34" charset="-122"/>
                 <a:cs typeface="Calibri" pitchFamily="34" charset="-120"/>
               </a:rPr>
-              <a:t>Location Verification</a:t>
+              <a:t>Geofencing</a:t>
             </a:r>
             <a:endParaRPr lang="en-US" sz="1450" dirty="0"/>
           </a:p>
@@ -7677,7 +7677,7 @@
                 <a:ea typeface="Calibri" pitchFamily="34" charset="-122"/>
                 <a:cs typeface="Calibri" pitchFamily="34" charset="-120"/>
               </a:rPr>
-              <a:t>A yes or no about a zone. No track of the man is ever built.</a:t>
+              <a:t>One subscription per line and work zone, created at induction.</a:t>
             </a:r>
             <a:endParaRPr lang="en-US" sz="1250" dirty="0"/>
           </a:p>
@@ -7768,7 +7768,7 @@
                 <a:ea typeface="Calibri" pitchFamily="34" charset="-122"/>
                 <a:cs typeface="Calibri" pitchFamily="34" charset="-120"/>
               </a:rPr>
-              <a:t>Location Retrieval</a:t>
+              <a:t>Location Verification</a:t>
             </a:r>
             <a:endParaRPr lang="en-US" sz="1450" dirty="0"/>
           </a:p>
@@ -7810,7 +7810,7 @@
                 <a:ea typeface="Calibri" pitchFamily="34" charset="-122"/>
                 <a:cs typeface="Calibri" pitchFamily="34" charset="-120"/>
               </a:rPr>
-              <a:t>A last known area, only for a line that stayed silent in an alert.</a:t>
+              <a:t>A yes or no about a zone. No track of the man is ever built.</a:t>
             </a:r>
             <a:endParaRPr lang="en-US" sz="1250" dirty="0"/>
           </a:p>
@@ -8034,7 +8034,7 @@
                 <a:ea typeface="Calibri" pitchFamily="34" charset="-122"/>
                 <a:cs typeface="Calibri" pitchFamily="34" charset="-120"/>
               </a:rPr>
-              <a:t>Congestion Insights</a:t>
+              <a:t>Location Retrieval</a:t>
             </a:r>
             <a:endParaRPr lang="en-US" sz="1450" dirty="0"/>
           </a:p>
@@ -8076,7 +8076,7 @@
                 <a:ea typeface="Calibri" pitchFamily="34" charset="-122"/>
                 <a:cs typeface="Calibri" pitchFamily="34" charset="-120"/>
               </a:rPr>
-              <a:t>Shows how full the cell is once every phone on site starts calling.</a:t>
+              <a:t>A last known area, only for a line that stayed silent in an alert.</a:t>
             </a:r>
             <a:endParaRPr lang="en-US" sz="1250" dirty="0"/>
           </a:p>
@@ -8167,7 +8167,7 @@
                 <a:ea typeface="Calibri" pitchFamily="34" charset="-122"/>
                 <a:cs typeface="Calibri" pitchFamily="34" charset="-120"/>
               </a:rPr>
-              <a:t>Quality on Demand</a:t>
+              <a:t>Congestion Insights</a:t>
             </a:r>
             <a:endParaRPr lang="en-US" sz="1450" dirty="0"/>
           </a:p>
@@ -8209,7 +8209,7 @@
                 <a:ea typeface="Calibri" pitchFamily="34" charset="-122"/>
                 <a:cs typeface="Calibri" pitchFamily="34" charset="-120"/>
               </a:rPr>
-              <a:t>Books stable video for the medic and the incident commander.</a:t>
+              <a:t>Shows how full the cell is once every phone on site starts calling.</a:t>
             </a:r>
             <a:endParaRPr lang="en-US" sz="1250" dirty="0"/>
           </a:p>
@@ -8300,7 +8300,7 @@
                 <a:ea typeface="Calibri" pitchFamily="34" charset="-122"/>
                 <a:cs typeface="Calibri" pitchFamily="34" charset="-120"/>
               </a:rPr>
-              <a:t>Network Slice Management</a:t>
+              <a:t>Slice Device Attachment</a:t>
             </a:r>
             <a:endParaRPr lang="en-US" sz="1450" dirty="0"/>
           </a:p>
@@ -8342,7 +8342,7 @@
                 <a:ea typeface="Calibri" pitchFamily="34" charset="-122"/>
                 <a:cs typeface="Calibri" pitchFamily="34" charset="-120"/>
               </a:rPr>
-              <a:t>Holds a private lane for the emergency team during a large event.</a:t>
+              <a:t>Puts the rescue team's phones and drones on a private lane in seconds.</a:t>
             </a:r>
             <a:endParaRPr lang="en-US" sz="1250" dirty="0"/>
           </a:p>
@@ -8433,7 +8433,7 @@
                 <a:ea typeface="Calibri" pitchFamily="34" charset="-122"/>
                 <a:cs typeface="Calibri" pitchFamily="34" charset="-120"/>
               </a:rPr>
-              <a:t>Slice Device Attachment</a:t>
+              <a:t>Quality on Demand</a:t>
             </a:r>
             <a:endParaRPr lang="en-US" sz="1450" dirty="0"/>
           </a:p>
@@ -8475,7 +8475,7 @@
                 <a:ea typeface="Calibri" pitchFamily="34" charset="-122"/>
                 <a:cs typeface="Calibri" pitchFamily="34" charset="-120"/>
               </a:rPr>
-              <a:t>Puts the right team phones and drones on that lane in seconds.</a:t>
+              <a:t>Books stable video for the medic and the incident commander.</a:t>
             </a:r>
             <a:endParaRPr lang="en-US" sz="1250" dirty="0"/>
           </a:p>
@@ -8514,7 +8514,7 @@
                 <a:ea typeface="Calibri" pitchFamily="34" charset="-122"/>
                 <a:cs typeface="Calibri" pitchFamily="34" charset="-120"/>
               </a:rPr>
-              <a:t>All eight are wired in the working prototype, network slicing included. 8 scenarios, all reaching the outcome they claim, at 77.5% less than calling every check.</a:t>
+              <a:t>All eight are wired in the working prototype and called by the shipped scenarios. Eight scenarios, each reaching the outcome it claims, spending one to six calls a case and 77.5% less than calling every check.</a:t>
             </a:r>
             <a:endParaRPr lang="en-US" sz="1100" dirty="0"/>
           </a:p>
